--- a/catalog/samples/gantt.pptx
+++ b/catalog/samples/gantt.pptx
@@ -2952,7 +2952,7 @@
           </a:p>
           <a:p>
             <a:r>
-              <a:t>  "template_sha256": "b34fdabbf5df66e6506f93f66d5e05a1ab7f4d6a1484c757d34a71847df7b09e"</a:t>
+              <a:t>  "template_sha256": "6a90d697f1805271c1a48e0a7c9234be41feb8e2043094a07aa57b65f85a9767"</a:t>
             </a:r>
           </a:p>
           <a:p>
